--- a/Zadania domowe/Jakub_Wojciechowski_49872_homework_4_1_descriptive and Diagnostics.pptx
+++ b/Zadania domowe/Jakub_Wojciechowski_49872_homework_4_1_descriptive and Diagnostics.pptx
@@ -132,18 +132,18 @@
   <pc:docChgLst>
     <pc:chgData name="Jakub Wojciechowski" userId="ee59becc-10bc-4bea-a8c2-abcd21dbb78b" providerId="ADAL" clId="{6E28A7B6-A803-5EC2-8BCD-1276546AE81E}"/>
     <pc:docChg chg="modSld delSection">
-      <pc:chgData name="Jakub Wojciechowski" userId="ee59becc-10bc-4bea-a8c2-abcd21dbb78b" providerId="ADAL" clId="{6E28A7B6-A803-5EC2-8BCD-1276546AE81E}" dt="2026-10-07T21:06:09.796" v="6" actId="17853"/>
+      <pc:chgData name="Jakub Wojciechowski" userId="ee59becc-10bc-4bea-a8c2-abcd21dbb78b" providerId="ADAL" clId="{6E28A7B6-A803-5EC2-8BCD-1276546AE81E}" dt="2026-10-07T23:16:43.677" v="12" actId="20577"/>
       <pc:docMkLst>
         <pc:docMk/>
       </pc:docMkLst>
       <pc:sldChg chg="modSp mod">
-        <pc:chgData name="Jakub Wojciechowski" userId="ee59becc-10bc-4bea-a8c2-abcd21dbb78b" providerId="ADAL" clId="{6E28A7B6-A803-5EC2-8BCD-1276546AE81E}" dt="2026-10-07T21:02:48.518" v="5" actId="20577"/>
+        <pc:chgData name="Jakub Wojciechowski" userId="ee59becc-10bc-4bea-a8c2-abcd21dbb78b" providerId="ADAL" clId="{6E28A7B6-A803-5EC2-8BCD-1276546AE81E}" dt="2026-10-07T23:16:43.677" v="12" actId="20577"/>
         <pc:sldMkLst>
           <pc:docMk/>
           <pc:sldMk cId="0" sldId="256"/>
         </pc:sldMkLst>
         <pc:spChg chg="mod">
-          <ac:chgData name="Jakub Wojciechowski" userId="ee59becc-10bc-4bea-a8c2-abcd21dbb78b" providerId="ADAL" clId="{6E28A7B6-A803-5EC2-8BCD-1276546AE81E}" dt="2026-10-07T21:02:48.518" v="5" actId="20577"/>
+          <ac:chgData name="Jakub Wojciechowski" userId="ee59becc-10bc-4bea-a8c2-abcd21dbb78b" providerId="ADAL" clId="{6E28A7B6-A803-5EC2-8BCD-1276546AE81E}" dt="2026-10-07T23:16:43.677" v="12" actId="20577"/>
           <ac:spMkLst>
             <pc:docMk/>
             <pc:sldMk cId="0" sldId="256"/>
@@ -1862,7 +1862,7 @@
           </a:prstGeom>
           <a:extLst>
             <a:ext uri="{C572A759-6A51-4108-AA02-DFA0A04FC94B}">
-              <ma14:wrappingTextBoxFlag xmlns="" xmlns:ma14="http://schemas.microsoft.com/office/mac/drawingml/2011/main" val="0"/>
+              <ma14:wrappingTextBoxFlag xmlns:ma14="http://schemas.microsoft.com/office/mac/drawingml/2011/main" xmlns="" val="0"/>
             </a:ext>
           </a:extLst>
         </p:spPr>
@@ -1937,7 +1937,7 @@
           </a:prstGeom>
           <a:extLst>
             <a:ext uri="{C572A759-6A51-4108-AA02-DFA0A04FC94B}">
-              <ma14:wrappingTextBoxFlag xmlns="" xmlns:ma14="http://schemas.microsoft.com/office/mac/drawingml/2011/main" val="0"/>
+              <ma14:wrappingTextBoxFlag xmlns:ma14="http://schemas.microsoft.com/office/mac/drawingml/2011/main" xmlns="" val="0"/>
             </a:ext>
           </a:extLst>
         </p:spPr>
@@ -2326,7 +2326,23 @@
                   <a:schemeClr val="bg2"/>
                 </a:solidFill>
               </a:rPr>
-              <a:t>·  Jakub Wojciechowski  ·  Kozminski University</a:t>
+              <a:t>·  </a:t>
+            </a:r>
+            <a:r>
+              <a:rPr lang="en-US" sz="1800">
+                <a:solidFill>
+                  <a:schemeClr val="bg2"/>
+                </a:solidFill>
+              </a:rPr>
+              <a:t>Jakub Wojciechowski 49872  </a:t>
+            </a:r>
+            <a:r>
+              <a:rPr lang="en-US" sz="1800" dirty="0">
+                <a:solidFill>
+                  <a:schemeClr val="bg2"/>
+                </a:solidFill>
+              </a:rPr>
+              <a:t>·  Kozminski University</a:t>
             </a:r>
             <a:endParaRPr lang="en-US" sz="1800" dirty="0"/>
           </a:p>
@@ -2667,7 +2683,7 @@
           </a:prstGeom>
           <a:extLst>
             <a:ext uri="{C572A759-6A51-4108-AA02-DFA0A04FC94B}">
-              <ma14:wrappingTextBoxFlag xmlns="" xmlns:ma14="http://schemas.microsoft.com/office/mac/drawingml/2011/main" val="0"/>
+              <ma14:wrappingTextBoxFlag xmlns:ma14="http://schemas.microsoft.com/office/mac/drawingml/2011/main" xmlns="" val="0"/>
             </a:ext>
           </a:extLst>
         </p:spPr>
@@ -3001,7 +3017,7 @@
           </a:prstGeom>
           <a:extLst>
             <a:ext uri="{C572A759-6A51-4108-AA02-DFA0A04FC94B}">
-              <ma14:wrappingTextBoxFlag xmlns="" xmlns:ma14="http://schemas.microsoft.com/office/mac/drawingml/2011/main" val="0"/>
+              <ma14:wrappingTextBoxFlag xmlns:ma14="http://schemas.microsoft.com/office/mac/drawingml/2011/main" xmlns="" val="0"/>
             </a:ext>
           </a:extLst>
         </p:spPr>
@@ -8817,7 +8833,7 @@
           </a:prstGeom>
           <a:extLst>
             <a:ext uri="{C572A759-6A51-4108-AA02-DFA0A04FC94B}">
-              <ma14:wrappingTextBoxFlag xmlns="" xmlns:ma14="http://schemas.microsoft.com/office/mac/drawingml/2011/main" val="0"/>
+              <ma14:wrappingTextBoxFlag xmlns:ma14="http://schemas.microsoft.com/office/mac/drawingml/2011/main" xmlns="" val="0"/>
             </a:ext>
           </a:extLst>
         </p:spPr>
@@ -9064,7 +9080,7 @@
           </a:prstGeom>
           <a:extLst>
             <a:ext uri="{C572A759-6A51-4108-AA02-DFA0A04FC94B}">
-              <ma14:wrappingTextBoxFlag xmlns="" xmlns:ma14="http://schemas.microsoft.com/office/mac/drawingml/2011/main" val="0"/>
+              <ma14:wrappingTextBoxFlag xmlns:ma14="http://schemas.microsoft.com/office/mac/drawingml/2011/main" xmlns="" val="0"/>
             </a:ext>
           </a:extLst>
         </p:spPr>
@@ -9398,7 +9414,7 @@
           </a:prstGeom>
           <a:extLst>
             <a:ext uri="{C572A759-6A51-4108-AA02-DFA0A04FC94B}">
-              <ma14:wrappingTextBoxFlag xmlns="" xmlns:ma14="http://schemas.microsoft.com/office/mac/drawingml/2011/main" val="0"/>
+              <ma14:wrappingTextBoxFlag xmlns:ma14="http://schemas.microsoft.com/office/mac/drawingml/2011/main" xmlns="" val="0"/>
             </a:ext>
           </a:extLst>
         </p:spPr>
@@ -10705,7 +10721,7 @@
           </a:prstGeom>
           <a:extLst>
             <a:ext uri="{C572A759-6A51-4108-AA02-DFA0A04FC94B}">
-              <ma14:wrappingTextBoxFlag xmlns="" xmlns:ma14="http://schemas.microsoft.com/office/mac/drawingml/2011/main" val="0"/>
+              <ma14:wrappingTextBoxFlag xmlns:ma14="http://schemas.microsoft.com/office/mac/drawingml/2011/main" xmlns="" val="0"/>
             </a:ext>
           </a:extLst>
         </p:spPr>
@@ -11538,7 +11554,7 @@
           </a:prstGeom>
           <a:extLst>
             <a:ext uri="{C572A759-6A51-4108-AA02-DFA0A04FC94B}">
-              <ma14:wrappingTextBoxFlag xmlns="" xmlns:ma14="http://schemas.microsoft.com/office/mac/drawingml/2011/main" val="0"/>
+              <ma14:wrappingTextBoxFlag xmlns:ma14="http://schemas.microsoft.com/office/mac/drawingml/2011/main" xmlns="" val="0"/>
             </a:ext>
           </a:extLst>
         </p:spPr>
@@ -12449,7 +12465,7 @@
           </a:prstGeom>
           <a:extLst>
             <a:ext uri="{C572A759-6A51-4108-AA02-DFA0A04FC94B}">
-              <ma14:wrappingTextBoxFlag xmlns="" xmlns:ma14="http://schemas.microsoft.com/office/mac/drawingml/2011/main" val="0"/>
+              <ma14:wrappingTextBoxFlag xmlns:ma14="http://schemas.microsoft.com/office/mac/drawingml/2011/main" xmlns="" val="0"/>
             </a:ext>
           </a:extLst>
         </p:spPr>
@@ -15335,7 +15351,7 @@
           </a:prstGeom>
           <a:extLst>
             <a:ext uri="{C572A759-6A51-4108-AA02-DFA0A04FC94B}">
-              <ma14:wrappingTextBoxFlag xmlns="" xmlns:ma14="http://schemas.microsoft.com/office/mac/drawingml/2011/main" val="0"/>
+              <ma14:wrappingTextBoxFlag xmlns:ma14="http://schemas.microsoft.com/office/mac/drawingml/2011/main" xmlns="" val="0"/>
             </a:ext>
           </a:extLst>
         </p:spPr>
@@ -15667,7 +15683,7 @@
           </a:prstGeom>
           <a:extLst>
             <a:ext uri="{C572A759-6A51-4108-AA02-DFA0A04FC94B}">
-              <ma14:wrappingTextBoxFlag xmlns="" xmlns:ma14="http://schemas.microsoft.com/office/mac/drawingml/2011/main" val="0"/>
+              <ma14:wrappingTextBoxFlag xmlns:ma14="http://schemas.microsoft.com/office/mac/drawingml/2011/main" xmlns="" val="0"/>
             </a:ext>
           </a:extLst>
         </p:spPr>
@@ -15973,7 +15989,7 @@
           </a:prstGeom>
           <a:extLst>
             <a:ext uri="{C572A759-6A51-4108-AA02-DFA0A04FC94B}">
-              <ma14:wrappingTextBoxFlag xmlns="" xmlns:ma14="http://schemas.microsoft.com/office/mac/drawingml/2011/main" val="0"/>
+              <ma14:wrappingTextBoxFlag xmlns:ma14="http://schemas.microsoft.com/office/mac/drawingml/2011/main" xmlns="" val="0"/>
             </a:ext>
           </a:extLst>
         </p:spPr>
@@ -16238,7 +16254,7 @@
           </a:prstGeom>
           <a:extLst>
             <a:ext uri="{C572A759-6A51-4108-AA02-DFA0A04FC94B}">
-              <ma14:wrappingTextBoxFlag xmlns="" xmlns:ma14="http://schemas.microsoft.com/office/mac/drawingml/2011/main" val="0"/>
+              <ma14:wrappingTextBoxFlag xmlns:ma14="http://schemas.microsoft.com/office/mac/drawingml/2011/main" xmlns="" val="0"/>
             </a:ext>
           </a:extLst>
         </p:spPr>
@@ -20647,7 +20663,7 @@
           </a:prstGeom>
           <a:extLst>
             <a:ext uri="{C572A759-6A51-4108-AA02-DFA0A04FC94B}">
-              <ma14:wrappingTextBoxFlag xmlns="" xmlns:ma14="http://schemas.microsoft.com/office/mac/drawingml/2011/main" val="0"/>
+              <ma14:wrappingTextBoxFlag xmlns:ma14="http://schemas.microsoft.com/office/mac/drawingml/2011/main" xmlns="" val="0"/>
             </a:ext>
           </a:extLst>
         </p:spPr>
@@ -20856,7 +20872,7 @@
           </a:prstGeom>
           <a:extLst>
             <a:ext uri="{C572A759-6A51-4108-AA02-DFA0A04FC94B}">
-              <ma14:wrappingTextBoxFlag xmlns="" xmlns:ma14="http://schemas.microsoft.com/office/mac/drawingml/2011/main" val="0"/>
+              <ma14:wrappingTextBoxFlag xmlns:ma14="http://schemas.microsoft.com/office/mac/drawingml/2011/main" xmlns="" val="0"/>
             </a:ext>
           </a:extLst>
         </p:spPr>
@@ -22735,7 +22751,7 @@
           </a:prstGeom>
           <a:extLst>
             <a:ext uri="{C572A759-6A51-4108-AA02-DFA0A04FC94B}">
-              <ma14:wrappingTextBoxFlag xmlns="" xmlns:ma14="http://schemas.microsoft.com/office/mac/drawingml/2011/main" val="0"/>
+              <ma14:wrappingTextBoxFlag xmlns:ma14="http://schemas.microsoft.com/office/mac/drawingml/2011/main" xmlns="" val="0"/>
             </a:ext>
           </a:extLst>
         </p:spPr>
